--- a/Resumen ejecutivo Automatidata.pptx
+++ b/Resumen ejecutivo Automatidata.pptx
@@ -5,7 +5,7 @@
     <p:sldMasterId id="2147483663" r:id="rId1"/>
   </p:sldMasterIdLst>
   <p:notesMasterIdLst>
-    <p:notesMasterId r:id="rId10"/>
+    <p:notesMasterId r:id="rId11"/>
   </p:notesMasterIdLst>
   <p:sldIdLst>
     <p:sldId id="256" r:id="rId2"/>
@@ -13,23 +13,24 @@
     <p:sldId id="258" r:id="rId4"/>
     <p:sldId id="259" r:id="rId5"/>
     <p:sldId id="264" r:id="rId6"/>
-    <p:sldId id="260" r:id="rId7"/>
-    <p:sldId id="261" r:id="rId8"/>
-    <p:sldId id="262" r:id="rId9"/>
+    <p:sldId id="265" r:id="rId7"/>
+    <p:sldId id="260" r:id="rId8"/>
+    <p:sldId id="261" r:id="rId9"/>
+    <p:sldId id="262" r:id="rId10"/>
   </p:sldIdLst>
   <p:sldSz cx="7772400" cy="10058400"/>
   <p:notesSz cx="6858000" cy="9144000"/>
   <p:embeddedFontLst>
     <p:embeddedFont>
       <p:font typeface="Segoe UI" panose="020B0502040204020203" pitchFamily="34" charset="0"/>
-      <p:regular r:id="rId11"/>
-      <p:bold r:id="rId12"/>
-      <p:italic r:id="rId13"/>
-      <p:boldItalic r:id="rId14"/>
+      <p:regular r:id="rId12"/>
+      <p:bold r:id="rId13"/>
+      <p:italic r:id="rId14"/>
+      <p:boldItalic r:id="rId15"/>
     </p:embeddedFont>
     <p:embeddedFont>
       <p:font typeface="Wingdings 3" panose="05040102010807070707" pitchFamily="18" charset="2"/>
-      <p:regular r:id="rId15"/>
+      <p:regular r:id="rId16"/>
     </p:embeddedFont>
   </p:embeddedFontLst>
   <p:defaultTextStyle>
@@ -1008,7 +1009,13 @@
   <p:cSld>
     <p:spTree>
       <p:nvGrpSpPr>
-        <p:cNvPr id="1" name="Shape 447"/>
+        <p:cNvPr id="1" name="Shape 416">
+          <a:extLst>
+            <a:ext uri="{FF2B5EF4-FFF2-40B4-BE49-F238E27FC236}">
+              <a16:creationId xmlns:a16="http://schemas.microsoft.com/office/drawing/2014/main" id="{061E4194-FF81-534D-0E1B-364B603EF9ED}"/>
+            </a:ext>
+          </a:extLst>
+        </p:cNvPr>
         <p:cNvGrpSpPr/>
         <p:nvPr/>
       </p:nvGrpSpPr>
@@ -1022,7 +1029,13 @@
       </p:grpSpPr>
       <p:sp>
         <p:nvSpPr>
-          <p:cNvPr id="448" name="Google Shape;448;g1e3a6309cc6_3_334:notes"/>
+          <p:cNvPr id="417" name="Google Shape;417;g1e3a6309cc6_3_316:notes">
+            <a:extLst>
+              <a:ext uri="{FF2B5EF4-FFF2-40B4-BE49-F238E27FC236}">
+                <a16:creationId xmlns:a16="http://schemas.microsoft.com/office/drawing/2014/main" id="{C4BC05AC-D26B-6905-055C-D5F79A6AF2B7}"/>
+              </a:ext>
+            </a:extLst>
+          </p:cNvPr>
           <p:cNvSpPr>
             <a:spLocks noGrp="1" noRot="1" noChangeAspect="1"/>
           </p:cNvSpPr>
@@ -1063,7 +1076,13 @@
       </p:sp>
       <p:sp>
         <p:nvSpPr>
-          <p:cNvPr id="449" name="Google Shape;449;g1e3a6309cc6_3_334:notes"/>
+          <p:cNvPr id="418" name="Google Shape;418;g1e3a6309cc6_3_316:notes">
+            <a:extLst>
+              <a:ext uri="{FF2B5EF4-FFF2-40B4-BE49-F238E27FC236}">
+                <a16:creationId xmlns:a16="http://schemas.microsoft.com/office/drawing/2014/main" id="{D9B6F84A-F2E3-50E9-4205-8EB1CC2939DD}"/>
+              </a:ext>
+            </a:extLst>
+          </p:cNvPr>
           <p:cNvSpPr txBox="1">
             <a:spLocks noGrp="1"/>
           </p:cNvSpPr>
@@ -1100,6 +1119,11 @@
         </p:txBody>
       </p:sp>
     </p:spTree>
+    <p:extLst>
+      <p:ext uri="{BB962C8B-B14F-4D97-AF65-F5344CB8AC3E}">
+        <p14:creationId xmlns:p14="http://schemas.microsoft.com/office/powerpoint/2010/main" val="260788464"/>
+      </p:ext>
+    </p:extLst>
   </p:cSld>
   <p:clrMapOvr>
     <a:masterClrMapping/>
@@ -1112,7 +1136,7 @@
   <p:cSld>
     <p:spTree>
       <p:nvGrpSpPr>
-        <p:cNvPr id="1" name="Shape 455"/>
+        <p:cNvPr id="1" name="Shape 447"/>
         <p:cNvGrpSpPr/>
         <p:nvPr/>
       </p:nvGrpSpPr>
@@ -1126,7 +1150,7 @@
       </p:grpSpPr>
       <p:sp>
         <p:nvSpPr>
-          <p:cNvPr id="456" name="Google Shape;456;g1e3a6309cc6_3_338:notes"/>
+          <p:cNvPr id="448" name="Google Shape;448;g1e3a6309cc6_3_334:notes"/>
           <p:cNvSpPr>
             <a:spLocks noGrp="1" noRot="1" noChangeAspect="1"/>
           </p:cNvSpPr>
@@ -1167,7 +1191,7 @@
       </p:sp>
       <p:sp>
         <p:nvSpPr>
-          <p:cNvPr id="457" name="Google Shape;457;g1e3a6309cc6_3_338:notes"/>
+          <p:cNvPr id="449" name="Google Shape;449;g1e3a6309cc6_3_334:notes"/>
           <p:cNvSpPr txBox="1">
             <a:spLocks noGrp="1"/>
           </p:cNvSpPr>
@@ -1212,6 +1236,110 @@
 </file>
 
 <file path=ppt/notesSlides/notesSlide7.xml><?xml version="1.0" encoding="utf-8"?>
+<p:notes xmlns:a="http://schemas.openxmlformats.org/drawingml/2006/main" xmlns:r="http://schemas.openxmlformats.org/officeDocument/2006/relationships" xmlns:p="http://schemas.openxmlformats.org/presentationml/2006/main" showMasterSp="0" showMasterPhAnim="0">
+  <p:cSld>
+    <p:spTree>
+      <p:nvGrpSpPr>
+        <p:cNvPr id="1" name="Shape 455"/>
+        <p:cNvGrpSpPr/>
+        <p:nvPr/>
+      </p:nvGrpSpPr>
+      <p:grpSpPr>
+        <a:xfrm>
+          <a:off x="0" y="0"/>
+          <a:ext cx="0" cy="0"/>
+          <a:chOff x="0" y="0"/>
+          <a:chExt cx="0" cy="0"/>
+        </a:xfrm>
+      </p:grpSpPr>
+      <p:sp>
+        <p:nvSpPr>
+          <p:cNvPr id="456" name="Google Shape;456;g1e3a6309cc6_3_338:notes"/>
+          <p:cNvSpPr>
+            <a:spLocks noGrp="1" noRot="1" noChangeAspect="1"/>
+          </p:cNvSpPr>
+          <p:nvPr>
+            <p:ph type="sldImg" idx="2"/>
+          </p:nvPr>
+        </p:nvSpPr>
+        <p:spPr>
+          <a:xfrm>
+            <a:off x="2105025" y="685800"/>
+            <a:ext cx="2649538" cy="3429000"/>
+          </a:xfrm>
+          <a:custGeom>
+            <a:avLst/>
+            <a:gdLst/>
+            <a:ahLst/>
+            <a:cxnLst/>
+            <a:rect l="l" t="t" r="r" b="b"/>
+            <a:pathLst>
+              <a:path w="120000" h="120000" extrusionOk="0">
+                <a:moveTo>
+                  <a:pt x="0" y="0"/>
+                </a:moveTo>
+                <a:lnTo>
+                  <a:pt x="120000" y="0"/>
+                </a:lnTo>
+                <a:lnTo>
+                  <a:pt x="120000" y="120000"/>
+                </a:lnTo>
+                <a:lnTo>
+                  <a:pt x="0" y="120000"/>
+                </a:lnTo>
+                <a:close/>
+              </a:path>
+            </a:pathLst>
+          </a:custGeom>
+        </p:spPr>
+      </p:sp>
+      <p:sp>
+        <p:nvSpPr>
+          <p:cNvPr id="457" name="Google Shape;457;g1e3a6309cc6_3_338:notes"/>
+          <p:cNvSpPr txBox="1">
+            <a:spLocks noGrp="1"/>
+          </p:cNvSpPr>
+          <p:nvPr>
+            <p:ph type="body" idx="1"/>
+          </p:nvPr>
+        </p:nvSpPr>
+        <p:spPr>
+          <a:xfrm>
+            <a:off x="685800" y="4343400"/>
+            <a:ext cx="5486400" cy="4114800"/>
+          </a:xfrm>
+          <a:prstGeom prst="rect">
+            <a:avLst/>
+          </a:prstGeom>
+        </p:spPr>
+        <p:txBody>
+          <a:bodyPr spcFirstLastPara="1" wrap="square" lIns="91425" tIns="91425" rIns="91425" bIns="91425" anchor="t" anchorCtr="0">
+            <a:noAutofit/>
+          </a:bodyPr>
+          <a:lstStyle/>
+          <a:p>
+            <a:pPr marL="0" lvl="0" indent="0" algn="l" rtl="0">
+              <a:spcBef>
+                <a:spcPts val="0"/>
+              </a:spcBef>
+              <a:spcAft>
+                <a:spcPts val="0"/>
+              </a:spcAft>
+              <a:buNone/>
+            </a:pPr>
+            <a:endParaRPr/>
+          </a:p>
+        </p:txBody>
+      </p:sp>
+    </p:spTree>
+  </p:cSld>
+  <p:clrMapOvr>
+    <a:masterClrMapping/>
+  </p:clrMapOvr>
+</p:notes>
+</file>
+
+<file path=ppt/notesSlides/notesSlide8.xml><?xml version="1.0" encoding="utf-8"?>
 <p:notes xmlns:a="http://schemas.openxmlformats.org/drawingml/2006/main" xmlns:r="http://schemas.openxmlformats.org/officeDocument/2006/relationships" xmlns:p="http://schemas.openxmlformats.org/presentationml/2006/main" showMasterSp="0" showMasterPhAnim="0">
   <p:cSld>
     <p:spTree>
@@ -1501,7 +1629,7 @@
           <a:p>
             <a:fld id="{4AAD347D-5ACD-4C99-B74B-A9C85AD731AF}" type="datetimeFigureOut">
               <a:rPr lang="en-US" dirty="0"/>
-              <a:t>6/23/2026</a:t>
+              <a:t>6/30/2026</a:t>
             </a:fld>
             <a:endParaRPr lang="en-US" dirty="0"/>
           </a:p>
@@ -1786,7 +1914,7 @@
           <a:p>
             <a:fld id="{4509A250-FF31-4206-8172-F9D3106AACB1}" type="datetimeFigureOut">
               <a:rPr lang="en-US" dirty="0"/>
-              <a:t>6/23/2026</a:t>
+              <a:t>6/30/2026</a:t>
             </a:fld>
             <a:endParaRPr lang="en-US" dirty="0"/>
           </a:p>
@@ -1990,7 +2118,7 @@
           <a:p>
             <a:fld id="{4509A250-FF31-4206-8172-F9D3106AACB1}" type="datetimeFigureOut">
               <a:rPr lang="en-US" dirty="0"/>
-              <a:t>6/23/2026</a:t>
+              <a:t>6/30/2026</a:t>
             </a:fld>
             <a:endParaRPr lang="en-US" dirty="0"/>
           </a:p>
@@ -2273,7 +2401,7 @@
           <a:p>
             <a:fld id="{4509A250-FF31-4206-8172-F9D3106AACB1}" type="datetimeFigureOut">
               <a:rPr lang="en-US" dirty="0"/>
-              <a:t>6/23/2026</a:t>
+              <a:t>6/30/2026</a:t>
             </a:fld>
             <a:endParaRPr lang="en-US" dirty="0"/>
           </a:p>
@@ -2624,7 +2752,7 @@
           <a:p>
             <a:fld id="{4509A250-FF31-4206-8172-F9D3106AACB1}" type="datetimeFigureOut">
               <a:rPr lang="en-US" dirty="0"/>
-              <a:t>6/23/2026</a:t>
+              <a:t>6/30/2026</a:t>
             </a:fld>
             <a:endParaRPr lang="en-US" dirty="0"/>
           </a:p>
@@ -3257,7 +3385,7 @@
           <a:p>
             <a:fld id="{4509A250-FF31-4206-8172-F9D3106AACB1}" type="datetimeFigureOut">
               <a:rPr lang="en-US" dirty="0"/>
-              <a:t>6/23/2026</a:t>
+              <a:t>6/30/2026</a:t>
             </a:fld>
             <a:endParaRPr lang="en-US" dirty="0"/>
           </a:p>
@@ -4127,7 +4255,7 @@
           <a:p>
             <a:fld id="{4509A250-FF31-4206-8172-F9D3106AACB1}" type="datetimeFigureOut">
               <a:rPr lang="en-US" dirty="0"/>
-              <a:t>6/23/2026</a:t>
+              <a:t>6/30/2026</a:t>
             </a:fld>
             <a:endParaRPr lang="en-US" dirty="0"/>
           </a:p>
@@ -4307,7 +4435,7 @@
           <a:p>
             <a:fld id="{4509A250-FF31-4206-8172-F9D3106AACB1}" type="datetimeFigureOut">
               <a:rPr lang="en-US" dirty="0"/>
-              <a:t>6/23/2026</a:t>
+              <a:t>6/30/2026</a:t>
             </a:fld>
             <a:endParaRPr lang="en-US" dirty="0"/>
           </a:p>
@@ -4497,7 +4625,7 @@
           <a:p>
             <a:fld id="{4509A250-FF31-4206-8172-F9D3106AACB1}" type="datetimeFigureOut">
               <a:rPr lang="en-US" dirty="0"/>
-              <a:t>6/23/2026</a:t>
+              <a:t>6/30/2026</a:t>
             </a:fld>
             <a:endParaRPr lang="en-US" dirty="0"/>
           </a:p>
@@ -4767,7 +4895,7 @@
           <a:p>
             <a:fld id="{4509A250-FF31-4206-8172-F9D3106AACB1}" type="datetimeFigureOut">
               <a:rPr lang="en-US" dirty="0"/>
-              <a:t>6/23/2026</a:t>
+              <a:t>6/30/2026</a:t>
             </a:fld>
             <a:endParaRPr lang="en-US" dirty="0"/>
           </a:p>
@@ -5373,7 +5501,7 @@
           <a:p>
             <a:fld id="{9796027F-7875-4030-9381-8BD8C4F21935}" type="datetimeFigureOut">
               <a:rPr lang="en-US" dirty="0"/>
-              <a:t>6/23/2026</a:t>
+              <a:t>6/30/2026</a:t>
             </a:fld>
             <a:endParaRPr lang="en-US" dirty="0"/>
           </a:p>
@@ -5675,7 +5803,7 @@
           <a:p>
             <a:fld id="{9796027F-7875-4030-9381-8BD8C4F21935}" type="datetimeFigureOut">
               <a:rPr lang="en-US" dirty="0"/>
-              <a:t>6/23/2026</a:t>
+              <a:t>6/30/2026</a:t>
             </a:fld>
             <a:endParaRPr lang="en-US" dirty="0"/>
           </a:p>
@@ -6129,7 +6257,7 @@
           <a:p>
             <a:fld id="{9796027F-7875-4030-9381-8BD8C4F21935}" type="datetimeFigureOut">
               <a:rPr lang="en-US" dirty="0"/>
-              <a:t>6/23/2026</a:t>
+              <a:t>6/30/2026</a:t>
             </a:fld>
             <a:endParaRPr lang="en-US" dirty="0"/>
           </a:p>
@@ -6257,7 +6385,7 @@
           <a:p>
             <a:fld id="{4509A250-FF31-4206-8172-F9D3106AACB1}" type="datetimeFigureOut">
               <a:rPr lang="en-US" dirty="0"/>
-              <a:t>6/23/2026</a:t>
+              <a:t>6/30/2026</a:t>
             </a:fld>
             <a:endParaRPr lang="en-US" dirty="0"/>
           </a:p>
@@ -6362,7 +6490,7 @@
           <a:p>
             <a:fld id="{4509A250-FF31-4206-8172-F9D3106AACB1}" type="datetimeFigureOut">
               <a:rPr lang="en-US" dirty="0"/>
-              <a:t>6/23/2026</a:t>
+              <a:t>6/30/2026</a:t>
             </a:fld>
             <a:endParaRPr lang="en-US" dirty="0"/>
           </a:p>
@@ -6651,7 +6779,7 @@
           <a:p>
             <a:fld id="{4509A250-FF31-4206-8172-F9D3106AACB1}" type="datetimeFigureOut">
               <a:rPr lang="en-US" dirty="0"/>
-              <a:t>6/23/2026</a:t>
+              <a:t>6/30/2026</a:t>
             </a:fld>
             <a:endParaRPr lang="en-US" dirty="0"/>
           </a:p>
@@ -6936,7 +7064,7 @@
           <a:p>
             <a:fld id="{4509A250-FF31-4206-8172-F9D3106AACB1}" type="datetimeFigureOut">
               <a:rPr lang="en-US" dirty="0"/>
-              <a:t>6/23/2026</a:t>
+              <a:t>6/30/2026</a:t>
             </a:fld>
             <a:endParaRPr lang="en-US" dirty="0"/>
           </a:p>
@@ -7511,7 +7639,7 @@
             <a:fld id="{4AAD347D-5ACD-4C99-B74B-A9C85AD731AF}" type="datetimeFigureOut">
               <a:rPr lang="en-US" smtClean="0"/>
               <a:pPr/>
-              <a:t>6/23/2026</a:t>
+              <a:t>6/30/2026</a:t>
             </a:fld>
             <a:endParaRPr lang="en-US" dirty="0"/>
           </a:p>
@@ -11140,6 +11268,865 @@
   <p:cSld>
     <p:spTree>
       <p:nvGrpSpPr>
+        <p:cNvPr id="1" name="Shape 419">
+          <a:extLst>
+            <a:ext uri="{FF2B5EF4-FFF2-40B4-BE49-F238E27FC236}">
+              <a16:creationId xmlns:a16="http://schemas.microsoft.com/office/drawing/2014/main" id="{EAFAEB7D-E0FF-57F9-A6FA-71DDFC498830}"/>
+            </a:ext>
+          </a:extLst>
+        </p:cNvPr>
+        <p:cNvGrpSpPr/>
+        <p:nvPr/>
+      </p:nvGrpSpPr>
+      <p:grpSpPr>
+        <a:xfrm>
+          <a:off x="0" y="0"/>
+          <a:ext cx="0" cy="0"/>
+          <a:chOff x="0" y="0"/>
+          <a:chExt cx="0" cy="0"/>
+        </a:xfrm>
+      </p:grpSpPr>
+      <p:sp>
+        <p:nvSpPr>
+          <p:cNvPr id="420" name="Google Shape;420;p17">
+            <a:extLst>
+              <a:ext uri="{FF2B5EF4-FFF2-40B4-BE49-F238E27FC236}">
+                <a16:creationId xmlns:a16="http://schemas.microsoft.com/office/drawing/2014/main" id="{01090BB8-AA0D-07CB-BA69-1811B38EC72B}"/>
+              </a:ext>
+            </a:extLst>
+          </p:cNvPr>
+          <p:cNvSpPr txBox="1"/>
+          <p:nvPr/>
+        </p:nvSpPr>
+        <p:spPr>
+          <a:xfrm>
+            <a:off x="188700" y="1757463"/>
+            <a:ext cx="3697500" cy="285000"/>
+          </a:xfrm>
+          <a:prstGeom prst="rect">
+            <a:avLst/>
+          </a:prstGeom>
+          <a:noFill/>
+          <a:ln>
+            <a:noFill/>
+          </a:ln>
+        </p:spPr>
+        <p:txBody>
+          <a:bodyPr spcFirstLastPara="1" wrap="square" lIns="91425" tIns="91425" rIns="91425" bIns="91425" anchor="t" anchorCtr="0">
+            <a:noAutofit/>
+          </a:bodyPr>
+          <a:lstStyle/>
+          <a:p>
+            <a:pPr lvl="0">
+              <a:lnSpc>
+                <a:spcPct val="85000"/>
+              </a:lnSpc>
+              <a:buSzPts val="853"/>
+            </a:pPr>
+            <a:r>
+              <a:rPr lang="es-ES" sz="1600" b="1" dirty="0"/>
+              <a:t>Objetivo del análisis</a:t>
+            </a:r>
+            <a:r>
+              <a:rPr lang="es-ES" sz="1600" dirty="0"/>
+              <a:t> </a:t>
+            </a:r>
+            <a:endParaRPr sz="1600" b="1" dirty="0">
+              <a:solidFill>
+                <a:schemeClr val="accent1"/>
+              </a:solidFill>
+              <a:latin typeface="Segoe UI" panose="020B0502040204020203" pitchFamily="34" charset="0"/>
+              <a:ea typeface="Google Sans SemiBold"/>
+              <a:cs typeface="Segoe UI" panose="020B0502040204020203" pitchFamily="34" charset="0"/>
+              <a:sym typeface="Google Sans SemiBold"/>
+            </a:endParaRPr>
+          </a:p>
+        </p:txBody>
+      </p:sp>
+      <p:sp>
+        <p:nvSpPr>
+          <p:cNvPr id="421" name="Google Shape;421;p17">
+            <a:extLst>
+              <a:ext uri="{FF2B5EF4-FFF2-40B4-BE49-F238E27FC236}">
+                <a16:creationId xmlns:a16="http://schemas.microsoft.com/office/drawing/2014/main" id="{3F846076-5D65-55D7-6D5A-E0E3FD290F64}"/>
+              </a:ext>
+            </a:extLst>
+          </p:cNvPr>
+          <p:cNvSpPr txBox="1"/>
+          <p:nvPr/>
+        </p:nvSpPr>
+        <p:spPr>
+          <a:xfrm>
+            <a:off x="188700" y="2063116"/>
+            <a:ext cx="3805794" cy="830966"/>
+          </a:xfrm>
+          <a:prstGeom prst="rect">
+            <a:avLst/>
+          </a:prstGeom>
+          <a:noFill/>
+          <a:ln>
+            <a:noFill/>
+          </a:ln>
+        </p:spPr>
+        <p:txBody>
+          <a:bodyPr spcFirstLastPara="1" wrap="square" lIns="91425" tIns="91425" rIns="91425" bIns="91425" anchor="t" anchorCtr="0">
+            <a:spAutoFit/>
+          </a:bodyPr>
+          <a:lstStyle/>
+          <a:p>
+            <a:pPr lvl="0"/>
+            <a:r>
+              <a:rPr lang="es-ES" sz="1400" dirty="0"/>
+              <a:t>Evaluar el rendimiento del modelo de regresión lineal múltiple (MLR) para predecir tarifas de taxi en NYC.</a:t>
+            </a:r>
+            <a:endParaRPr sz="1400" dirty="0">
+              <a:latin typeface="Segoe UI" panose="020B0502040204020203" pitchFamily="34" charset="0"/>
+              <a:cs typeface="Segoe UI" panose="020B0502040204020203" pitchFamily="34" charset="0"/>
+            </a:endParaRPr>
+          </a:p>
+        </p:txBody>
+      </p:sp>
+      <p:sp>
+        <p:nvSpPr>
+          <p:cNvPr id="423" name="Google Shape;423;p17">
+            <a:extLst>
+              <a:ext uri="{FF2B5EF4-FFF2-40B4-BE49-F238E27FC236}">
+                <a16:creationId xmlns:a16="http://schemas.microsoft.com/office/drawing/2014/main" id="{D9062F6F-DD75-640C-DB1E-C46C77618D42}"/>
+              </a:ext>
+            </a:extLst>
+          </p:cNvPr>
+          <p:cNvSpPr txBox="1"/>
+          <p:nvPr/>
+        </p:nvSpPr>
+        <p:spPr>
+          <a:xfrm>
+            <a:off x="4203508" y="2063116"/>
+            <a:ext cx="3150246" cy="838226"/>
+          </a:xfrm>
+          <a:prstGeom prst="rect">
+            <a:avLst/>
+          </a:prstGeom>
+          <a:noFill/>
+          <a:ln>
+            <a:noFill/>
+          </a:ln>
+        </p:spPr>
+        <p:txBody>
+          <a:bodyPr spcFirstLastPara="1" wrap="square" lIns="91425" tIns="91425" rIns="91425" bIns="91425" anchor="t" anchorCtr="0">
+            <a:noAutofit/>
+          </a:bodyPr>
+          <a:lstStyle/>
+          <a:p>
+            <a:pPr lvl="0">
+              <a:lnSpc>
+                <a:spcPct val="105000"/>
+              </a:lnSpc>
+            </a:pPr>
+            <a:r>
+              <a:rPr lang="es-ES" sz="1400" dirty="0"/>
+              <a:t>• MAE = 1.74 USD</a:t>
+            </a:r>
+          </a:p>
+          <a:p>
+            <a:pPr lvl="0">
+              <a:lnSpc>
+                <a:spcPct val="105000"/>
+              </a:lnSpc>
+            </a:pPr>
+            <a:r>
+              <a:rPr lang="es-ES" sz="1400" dirty="0"/>
+              <a:t>• RMSE = 3.25 USD</a:t>
+            </a:r>
+          </a:p>
+          <a:p>
+            <a:pPr lvl="0">
+              <a:lnSpc>
+                <a:spcPct val="105000"/>
+              </a:lnSpc>
+            </a:pPr>
+            <a:r>
+              <a:rPr lang="es-ES" sz="1400" dirty="0"/>
+              <a:t>• R² = 0.903</a:t>
+            </a:r>
+            <a:endParaRPr sz="1400" dirty="0">
+              <a:solidFill>
+                <a:srgbClr val="000000"/>
+              </a:solidFill>
+              <a:latin typeface="Segoe UI" panose="020B0502040204020203" pitchFamily="34" charset="0"/>
+              <a:ea typeface="Lato"/>
+              <a:cs typeface="Segoe UI" panose="020B0502040204020203" pitchFamily="34" charset="0"/>
+              <a:sym typeface="Lato"/>
+            </a:endParaRPr>
+          </a:p>
+        </p:txBody>
+      </p:sp>
+      <p:grpSp>
+        <p:nvGrpSpPr>
+          <p:cNvPr id="424" name="Google Shape;424;p17">
+            <a:extLst>
+              <a:ext uri="{FF2B5EF4-FFF2-40B4-BE49-F238E27FC236}">
+                <a16:creationId xmlns:a16="http://schemas.microsoft.com/office/drawing/2014/main" id="{02BFE414-94D2-7F73-AA7D-4AC15656E91D}"/>
+              </a:ext>
+            </a:extLst>
+          </p:cNvPr>
+          <p:cNvGrpSpPr/>
+          <p:nvPr/>
+        </p:nvGrpSpPr>
+        <p:grpSpPr>
+          <a:xfrm>
+            <a:off x="188700" y="600518"/>
+            <a:ext cx="6309082" cy="810653"/>
+            <a:chOff x="188700" y="665125"/>
+            <a:chExt cx="5190000" cy="1046248"/>
+          </a:xfrm>
+        </p:grpSpPr>
+        <p:sp>
+          <p:nvSpPr>
+            <p:cNvPr id="425" name="Google Shape;425;p17">
+              <a:extLst>
+                <a:ext uri="{FF2B5EF4-FFF2-40B4-BE49-F238E27FC236}">
+                  <a16:creationId xmlns:a16="http://schemas.microsoft.com/office/drawing/2014/main" id="{ACCE39E7-E061-F576-4FC4-45B923CA2EC6}"/>
+                </a:ext>
+              </a:extLst>
+            </p:cNvPr>
+            <p:cNvSpPr txBox="1"/>
+            <p:nvPr/>
+          </p:nvSpPr>
+          <p:spPr>
+            <a:xfrm>
+              <a:off x="188700" y="665125"/>
+              <a:ext cx="5190000" cy="771300"/>
+            </a:xfrm>
+            <a:prstGeom prst="rect">
+              <a:avLst/>
+            </a:prstGeom>
+            <a:noFill/>
+            <a:ln>
+              <a:noFill/>
+            </a:ln>
+            <a:effectLst>
+              <a:outerShdw blurRad="57150" dist="19050" dir="5400000" algn="bl" rotWithShape="0">
+                <a:srgbClr val="000000">
+                  <a:alpha val="50000"/>
+                </a:srgbClr>
+              </a:outerShdw>
+            </a:effectLst>
+          </p:spPr>
+          <p:txBody>
+            <a:bodyPr spcFirstLastPara="1" wrap="square" lIns="91425" tIns="91425" rIns="91425" bIns="91425" anchor="t" anchorCtr="0">
+              <a:normAutofit/>
+            </a:bodyPr>
+            <a:lstStyle/>
+            <a:p>
+              <a:pPr marL="0" lvl="0" indent="0" algn="l" rtl="0">
+                <a:lnSpc>
+                  <a:spcPct val="95000"/>
+                </a:lnSpc>
+                <a:spcBef>
+                  <a:spcPts val="0"/>
+                </a:spcBef>
+                <a:spcAft>
+                  <a:spcPts val="0"/>
+                </a:spcAft>
+                <a:buNone/>
+              </a:pPr>
+              <a:r>
+                <a:rPr lang="es-ES" sz="2800" b="1" dirty="0">
+                  <a:latin typeface="Segoe UI" panose="020B0502040204020203" pitchFamily="34" charset="0"/>
+                  <a:ea typeface="Google Sans SemiBold"/>
+                  <a:cs typeface="Segoe UI" panose="020B0502040204020203" pitchFamily="34" charset="0"/>
+                  <a:sym typeface="Google Sans SemiBold"/>
+                </a:rPr>
+                <a:t>Resultados del modelo de regresión</a:t>
+              </a:r>
+              <a:endParaRPr sz="2800" dirty="0">
+                <a:solidFill>
+                  <a:srgbClr val="000000"/>
+                </a:solidFill>
+                <a:latin typeface="Segoe UI" panose="020B0502040204020203" pitchFamily="34" charset="0"/>
+                <a:ea typeface="Google Sans SemiBold"/>
+                <a:cs typeface="Segoe UI" panose="020B0502040204020203" pitchFamily="34" charset="0"/>
+                <a:sym typeface="Google Sans SemiBold"/>
+              </a:endParaRPr>
+            </a:p>
+          </p:txBody>
+        </p:sp>
+        <p:sp>
+          <p:nvSpPr>
+            <p:cNvPr id="426" name="Google Shape;426;p17">
+              <a:extLst>
+                <a:ext uri="{FF2B5EF4-FFF2-40B4-BE49-F238E27FC236}">
+                  <a16:creationId xmlns:a16="http://schemas.microsoft.com/office/drawing/2014/main" id="{12BC5A38-E545-E158-9188-CF2843C39980}"/>
+                </a:ext>
+              </a:extLst>
+            </p:cNvPr>
+            <p:cNvSpPr txBox="1"/>
+            <p:nvPr/>
+          </p:nvSpPr>
+          <p:spPr>
+            <a:xfrm>
+              <a:off x="188700" y="1159319"/>
+              <a:ext cx="5190000" cy="552054"/>
+            </a:xfrm>
+            <a:prstGeom prst="rect">
+              <a:avLst/>
+            </a:prstGeom>
+            <a:noFill/>
+            <a:ln>
+              <a:noFill/>
+            </a:ln>
+          </p:spPr>
+          <p:txBody>
+            <a:bodyPr spcFirstLastPara="1" wrap="square" lIns="91425" tIns="91425" rIns="91425" bIns="91425" anchor="t" anchorCtr="0">
+              <a:noAutofit/>
+            </a:bodyPr>
+            <a:lstStyle/>
+            <a:p>
+              <a:pPr marL="0" lvl="0" indent="0" algn="l" rtl="0">
+                <a:spcBef>
+                  <a:spcPts val="0"/>
+                </a:spcBef>
+                <a:spcAft>
+                  <a:spcPts val="1200"/>
+                </a:spcAft>
+                <a:buNone/>
+              </a:pPr>
+              <a:r>
+                <a:rPr lang="es-ES" dirty="0">
+                  <a:solidFill>
+                    <a:schemeClr val="bg2">
+                      <a:lumMod val="20000"/>
+                      <a:lumOff val="80000"/>
+                    </a:schemeClr>
+                  </a:solidFill>
+                  <a:latin typeface="Segoe UI" panose="020B0502040204020203" pitchFamily="34" charset="0"/>
+                  <a:ea typeface="Roboto"/>
+                  <a:cs typeface="Segoe UI" panose="020B0502040204020203" pitchFamily="34" charset="0"/>
+                  <a:sym typeface="Roboto"/>
+                </a:rPr>
+                <a:t>Predicción de tarifas mediante modelo de regresión lineal múltiple</a:t>
+              </a:r>
+              <a:endParaRPr dirty="0">
+                <a:solidFill>
+                  <a:schemeClr val="bg2">
+                    <a:lumMod val="20000"/>
+                    <a:lumOff val="80000"/>
+                  </a:schemeClr>
+                </a:solidFill>
+                <a:latin typeface="Segoe UI" panose="020B0502040204020203" pitchFamily="34" charset="0"/>
+                <a:ea typeface="Roboto"/>
+                <a:cs typeface="Segoe UI" panose="020B0502040204020203" pitchFamily="34" charset="0"/>
+                <a:sym typeface="Roboto"/>
+              </a:endParaRPr>
+            </a:p>
+          </p:txBody>
+        </p:sp>
+      </p:grpSp>
+      <p:sp>
+        <p:nvSpPr>
+          <p:cNvPr id="2" name="Google Shape;423;p17">
+            <a:extLst>
+              <a:ext uri="{FF2B5EF4-FFF2-40B4-BE49-F238E27FC236}">
+                <a16:creationId xmlns:a16="http://schemas.microsoft.com/office/drawing/2014/main" id="{E841FB45-7528-4225-5586-4ACDB4C8DEF8}"/>
+              </a:ext>
+            </a:extLst>
+          </p:cNvPr>
+          <p:cNvSpPr txBox="1"/>
+          <p:nvPr/>
+        </p:nvSpPr>
+        <p:spPr>
+          <a:xfrm>
+            <a:off x="196280" y="3356927"/>
+            <a:ext cx="3798214" cy="1846229"/>
+          </a:xfrm>
+          <a:prstGeom prst="rect">
+            <a:avLst/>
+          </a:prstGeom>
+          <a:noFill/>
+          <a:ln>
+            <a:noFill/>
+          </a:ln>
+        </p:spPr>
+        <p:txBody>
+          <a:bodyPr spcFirstLastPara="1" wrap="square" lIns="91425" tIns="91425" rIns="91425" bIns="91425" anchor="t" anchorCtr="0">
+            <a:noAutofit/>
+          </a:bodyPr>
+          <a:lstStyle/>
+          <a:p>
+            <a:pPr lvl="0">
+              <a:lnSpc>
+                <a:spcPct val="105000"/>
+              </a:lnSpc>
+            </a:pPr>
+            <a:r>
+              <a:rPr lang="es-ES" sz="1400" dirty="0"/>
+              <a:t>• El modelo explica más del 90 % de la variabilidad de las tarifas. • Los errores medios son bajos, lo que indica alta precisión. • La distancia del viaje es el factor más determinante, seguida por la duración. • Los residuos se distribuyen de forma simétrica alrededor de 0, confirmando ausencia de sesgo.</a:t>
+            </a:r>
+            <a:endParaRPr sz="1400" dirty="0">
+              <a:solidFill>
+                <a:srgbClr val="000000"/>
+              </a:solidFill>
+              <a:latin typeface="Segoe UI" panose="020B0502040204020203" pitchFamily="34" charset="0"/>
+              <a:ea typeface="Lato"/>
+              <a:cs typeface="Segoe UI" panose="020B0502040204020203" pitchFamily="34" charset="0"/>
+              <a:sym typeface="Lato"/>
+            </a:endParaRPr>
+          </a:p>
+        </p:txBody>
+      </p:sp>
+      <p:sp>
+        <p:nvSpPr>
+          <p:cNvPr id="3" name="Google Shape;423;p17">
+            <a:extLst>
+              <a:ext uri="{FF2B5EF4-FFF2-40B4-BE49-F238E27FC236}">
+                <a16:creationId xmlns:a16="http://schemas.microsoft.com/office/drawing/2014/main" id="{8E5E314D-4175-6044-6299-E7475362FF36}"/>
+              </a:ext>
+            </a:extLst>
+          </p:cNvPr>
+          <p:cNvSpPr txBox="1"/>
+          <p:nvPr/>
+        </p:nvSpPr>
+        <p:spPr>
+          <a:xfrm>
+            <a:off x="4203508" y="3324990"/>
+            <a:ext cx="3229754" cy="1846229"/>
+          </a:xfrm>
+          <a:prstGeom prst="rect">
+            <a:avLst/>
+          </a:prstGeom>
+          <a:noFill/>
+          <a:ln>
+            <a:noFill/>
+          </a:ln>
+        </p:spPr>
+        <p:txBody>
+          <a:bodyPr spcFirstLastPara="1" wrap="square" lIns="91425" tIns="91425" rIns="91425" bIns="91425" anchor="t" anchorCtr="0">
+            <a:noAutofit/>
+          </a:bodyPr>
+          <a:lstStyle/>
+          <a:p>
+            <a:pPr lvl="0">
+              <a:lnSpc>
+                <a:spcPct val="105000"/>
+              </a:lnSpc>
+            </a:pPr>
+            <a:r>
+              <a:rPr lang="es-ES" sz="1400" dirty="0"/>
+              <a:t>• Predicciones fiables para estimar tarifas antes del viaje.</a:t>
+            </a:r>
+          </a:p>
+          <a:p>
+            <a:pPr lvl="0">
+              <a:lnSpc>
+                <a:spcPct val="105000"/>
+              </a:lnSpc>
+            </a:pPr>
+            <a:r>
+              <a:rPr lang="es-ES" sz="1400" dirty="0"/>
+              <a:t>• Apoyo a la planificación operativa y decisiones estratégicas de la TLC.</a:t>
+            </a:r>
+          </a:p>
+          <a:p>
+            <a:pPr lvl="0">
+              <a:lnSpc>
+                <a:spcPct val="105000"/>
+              </a:lnSpc>
+            </a:pPr>
+            <a:r>
+              <a:rPr lang="es-ES" sz="1400" dirty="0"/>
+              <a:t>• Posibilidad de integrar el modelo en sistemas de transparencia y optimización de rutas.</a:t>
+            </a:r>
+            <a:endParaRPr sz="1400" dirty="0">
+              <a:solidFill>
+                <a:srgbClr val="000000"/>
+              </a:solidFill>
+              <a:latin typeface="Segoe UI" panose="020B0502040204020203" pitchFamily="34" charset="0"/>
+              <a:ea typeface="Lato"/>
+              <a:cs typeface="Segoe UI" panose="020B0502040204020203" pitchFamily="34" charset="0"/>
+              <a:sym typeface="Lato"/>
+            </a:endParaRPr>
+          </a:p>
+        </p:txBody>
+      </p:sp>
+      <p:sp>
+        <p:nvSpPr>
+          <p:cNvPr id="5" name="CuadroTexto 4">
+            <a:extLst>
+              <a:ext uri="{FF2B5EF4-FFF2-40B4-BE49-F238E27FC236}">
+                <a16:creationId xmlns:a16="http://schemas.microsoft.com/office/drawing/2014/main" id="{E7A2AA8F-A6FA-5D3B-AD9D-0B275E997516}"/>
+              </a:ext>
+            </a:extLst>
+          </p:cNvPr>
+          <p:cNvSpPr txBox="1"/>
+          <p:nvPr/>
+        </p:nvSpPr>
+        <p:spPr>
+          <a:xfrm>
+            <a:off x="41525" y="7619378"/>
+            <a:ext cx="1664445" cy="1384995"/>
+          </a:xfrm>
+          <a:prstGeom prst="rect">
+            <a:avLst/>
+          </a:prstGeom>
+          <a:noFill/>
+        </p:spPr>
+        <p:txBody>
+          <a:bodyPr wrap="square">
+            <a:spAutoFit/>
+          </a:bodyPr>
+          <a:lstStyle/>
+          <a:p>
+            <a:r>
+              <a:rPr lang="es-ES" sz="1200" dirty="0"/>
+              <a:t>Las predicciones del modelo se alinean estrechamente con las tarifas reales, confirmando alta precisión.</a:t>
+            </a:r>
+            <a:endParaRPr lang="es-ES" sz="1200" dirty="0">
+              <a:latin typeface="Segoe UI" panose="020B0502040204020203" pitchFamily="34" charset="0"/>
+              <a:cs typeface="Segoe UI" panose="020B0502040204020203" pitchFamily="34" charset="0"/>
+            </a:endParaRPr>
+          </a:p>
+        </p:txBody>
+      </p:sp>
+      <p:sp>
+        <p:nvSpPr>
+          <p:cNvPr id="8" name="Google Shape;420;p17">
+            <a:extLst>
+              <a:ext uri="{FF2B5EF4-FFF2-40B4-BE49-F238E27FC236}">
+                <a16:creationId xmlns:a16="http://schemas.microsoft.com/office/drawing/2014/main" id="{560E779C-8156-F4DC-92AE-1BDA7C3F76C8}"/>
+              </a:ext>
+            </a:extLst>
+          </p:cNvPr>
+          <p:cNvSpPr txBox="1"/>
+          <p:nvPr/>
+        </p:nvSpPr>
+        <p:spPr>
+          <a:xfrm>
+            <a:off x="196280" y="2930488"/>
+            <a:ext cx="3150245" cy="390706"/>
+          </a:xfrm>
+          <a:prstGeom prst="rect">
+            <a:avLst/>
+          </a:prstGeom>
+          <a:noFill/>
+          <a:ln>
+            <a:noFill/>
+          </a:ln>
+        </p:spPr>
+        <p:txBody>
+          <a:bodyPr spcFirstLastPara="1" wrap="square" lIns="91425" tIns="91425" rIns="91425" bIns="91425" anchor="t" anchorCtr="0">
+            <a:noAutofit/>
+          </a:bodyPr>
+          <a:lstStyle/>
+          <a:p>
+            <a:pPr lvl="0">
+              <a:lnSpc>
+                <a:spcPct val="85000"/>
+              </a:lnSpc>
+              <a:buSzPts val="853"/>
+            </a:pPr>
+            <a:r>
+              <a:rPr lang="es-ES" sz="1600" b="1" dirty="0"/>
+              <a:t>Conclusiones principales</a:t>
+            </a:r>
+            <a:endParaRPr sz="1600" b="1" dirty="0">
+              <a:latin typeface="Segoe UI" panose="020B0502040204020203" pitchFamily="34" charset="0"/>
+              <a:ea typeface="Google Sans SemiBold"/>
+              <a:cs typeface="Segoe UI" panose="020B0502040204020203" pitchFamily="34" charset="0"/>
+              <a:sym typeface="Google Sans SemiBold"/>
+            </a:endParaRPr>
+          </a:p>
+        </p:txBody>
+      </p:sp>
+      <p:sp>
+        <p:nvSpPr>
+          <p:cNvPr id="9" name="Google Shape;420;p17">
+            <a:extLst>
+              <a:ext uri="{FF2B5EF4-FFF2-40B4-BE49-F238E27FC236}">
+                <a16:creationId xmlns:a16="http://schemas.microsoft.com/office/drawing/2014/main" id="{E68605B3-CB42-8090-1AD1-6957725BF2EC}"/>
+              </a:ext>
+            </a:extLst>
+          </p:cNvPr>
+          <p:cNvSpPr txBox="1"/>
+          <p:nvPr/>
+        </p:nvSpPr>
+        <p:spPr>
+          <a:xfrm>
+            <a:off x="4203508" y="1751347"/>
+            <a:ext cx="3150245" cy="390706"/>
+          </a:xfrm>
+          <a:prstGeom prst="rect">
+            <a:avLst/>
+          </a:prstGeom>
+          <a:noFill/>
+          <a:ln>
+            <a:noFill/>
+          </a:ln>
+        </p:spPr>
+        <p:txBody>
+          <a:bodyPr spcFirstLastPara="1" wrap="square" lIns="91425" tIns="91425" rIns="91425" bIns="91425" anchor="t" anchorCtr="0">
+            <a:noAutofit/>
+          </a:bodyPr>
+          <a:lstStyle/>
+          <a:p>
+            <a:pPr lvl="0">
+              <a:lnSpc>
+                <a:spcPct val="85000"/>
+              </a:lnSpc>
+              <a:buSzPts val="853"/>
+            </a:pPr>
+            <a:r>
+              <a:rPr lang="es-ES" sz="1600" b="1" dirty="0"/>
+              <a:t>Métricas clave</a:t>
+            </a:r>
+            <a:endParaRPr sz="1600" b="1" dirty="0">
+              <a:latin typeface="Segoe UI" panose="020B0502040204020203" pitchFamily="34" charset="0"/>
+              <a:ea typeface="Google Sans SemiBold"/>
+              <a:cs typeface="Segoe UI" panose="020B0502040204020203" pitchFamily="34" charset="0"/>
+              <a:sym typeface="Google Sans SemiBold"/>
+            </a:endParaRPr>
+          </a:p>
+        </p:txBody>
+      </p:sp>
+      <p:sp>
+        <p:nvSpPr>
+          <p:cNvPr id="10" name="Google Shape;420;p17">
+            <a:extLst>
+              <a:ext uri="{FF2B5EF4-FFF2-40B4-BE49-F238E27FC236}">
+                <a16:creationId xmlns:a16="http://schemas.microsoft.com/office/drawing/2014/main" id="{7351B6E8-2109-CBEC-4AB5-4A908DA26653}"/>
+              </a:ext>
+            </a:extLst>
+          </p:cNvPr>
+          <p:cNvSpPr txBox="1"/>
+          <p:nvPr/>
+        </p:nvSpPr>
+        <p:spPr>
+          <a:xfrm>
+            <a:off x="4203510" y="2967132"/>
+            <a:ext cx="3150245" cy="390706"/>
+          </a:xfrm>
+          <a:prstGeom prst="rect">
+            <a:avLst/>
+          </a:prstGeom>
+          <a:noFill/>
+          <a:ln>
+            <a:noFill/>
+          </a:ln>
+        </p:spPr>
+        <p:txBody>
+          <a:bodyPr spcFirstLastPara="1" wrap="square" lIns="91425" tIns="91425" rIns="91425" bIns="91425" anchor="t" anchorCtr="0">
+            <a:noAutofit/>
+          </a:bodyPr>
+          <a:lstStyle/>
+          <a:p>
+            <a:pPr lvl="0">
+              <a:lnSpc>
+                <a:spcPct val="85000"/>
+              </a:lnSpc>
+              <a:buSzPts val="853"/>
+            </a:pPr>
+            <a:r>
+              <a:rPr lang="es-ES" sz="1600" b="1" dirty="0"/>
+              <a:t>Impacto en el negocio</a:t>
+            </a:r>
+            <a:r>
+              <a:rPr lang="es-ES" sz="1600" dirty="0"/>
+              <a:t> </a:t>
+            </a:r>
+            <a:endParaRPr sz="1600" b="1" dirty="0">
+              <a:latin typeface="Segoe UI" panose="020B0502040204020203" pitchFamily="34" charset="0"/>
+              <a:ea typeface="Google Sans SemiBold"/>
+              <a:cs typeface="Segoe UI" panose="020B0502040204020203" pitchFamily="34" charset="0"/>
+              <a:sym typeface="Google Sans SemiBold"/>
+            </a:endParaRPr>
+          </a:p>
+        </p:txBody>
+      </p:sp>
+      <p:pic>
+        <p:nvPicPr>
+          <p:cNvPr id="12" name="Imagen 11">
+            <a:extLst>
+              <a:ext uri="{FF2B5EF4-FFF2-40B4-BE49-F238E27FC236}">
+                <a16:creationId xmlns:a16="http://schemas.microsoft.com/office/drawing/2014/main" id="{5FD9CE01-6C7A-1575-FB72-D3F80BFB650C}"/>
+              </a:ext>
+            </a:extLst>
+          </p:cNvPr>
+          <p:cNvPicPr>
+            <a:picLocks noChangeAspect="1"/>
+          </p:cNvPicPr>
+          <p:nvPr/>
+        </p:nvPicPr>
+        <p:blipFill>
+          <a:blip r:embed="rId3"/>
+          <a:stretch>
+            <a:fillRect/>
+          </a:stretch>
+        </p:blipFill>
+        <p:spPr>
+          <a:xfrm>
+            <a:off x="41525" y="5383484"/>
+            <a:ext cx="2126037" cy="2177499"/>
+          </a:xfrm>
+          <a:prstGeom prst="rect">
+            <a:avLst/>
+          </a:prstGeom>
+        </p:spPr>
+      </p:pic>
+      <p:pic>
+        <p:nvPicPr>
+          <p:cNvPr id="14" name="Imagen 13">
+            <a:extLst>
+              <a:ext uri="{FF2B5EF4-FFF2-40B4-BE49-F238E27FC236}">
+                <a16:creationId xmlns:a16="http://schemas.microsoft.com/office/drawing/2014/main" id="{06411455-DFEF-C1CF-5906-46376E57F93A}"/>
+              </a:ext>
+            </a:extLst>
+          </p:cNvPr>
+          <p:cNvPicPr>
+            <a:picLocks noChangeAspect="1"/>
+          </p:cNvPicPr>
+          <p:nvPr/>
+        </p:nvPicPr>
+        <p:blipFill>
+          <a:blip r:embed="rId4"/>
+          <a:stretch>
+            <a:fillRect/>
+          </a:stretch>
+        </p:blipFill>
+        <p:spPr>
+          <a:xfrm>
+            <a:off x="2139542" y="7477164"/>
+            <a:ext cx="2973010" cy="2231937"/>
+          </a:xfrm>
+          <a:prstGeom prst="rect">
+            <a:avLst/>
+          </a:prstGeom>
+        </p:spPr>
+      </p:pic>
+      <p:pic>
+        <p:nvPicPr>
+          <p:cNvPr id="16" name="Imagen 15">
+            <a:extLst>
+              <a:ext uri="{FF2B5EF4-FFF2-40B4-BE49-F238E27FC236}">
+                <a16:creationId xmlns:a16="http://schemas.microsoft.com/office/drawing/2014/main" id="{1A369199-A220-E968-BA39-E7A167A2DD40}"/>
+              </a:ext>
+            </a:extLst>
+          </p:cNvPr>
+          <p:cNvPicPr>
+            <a:picLocks noChangeAspect="1"/>
+          </p:cNvPicPr>
+          <p:nvPr/>
+        </p:nvPicPr>
+        <p:blipFill>
+          <a:blip r:embed="rId5"/>
+          <a:stretch>
+            <a:fillRect/>
+          </a:stretch>
+        </p:blipFill>
+        <p:spPr>
+          <a:xfrm>
+            <a:off x="5112552" y="5322415"/>
+            <a:ext cx="2589362" cy="2238568"/>
+          </a:xfrm>
+          <a:prstGeom prst="rect">
+            <a:avLst/>
+          </a:prstGeom>
+        </p:spPr>
+      </p:pic>
+      <p:sp>
+        <p:nvSpPr>
+          <p:cNvPr id="17" name="CuadroTexto 16">
+            <a:extLst>
+              <a:ext uri="{FF2B5EF4-FFF2-40B4-BE49-F238E27FC236}">
+                <a16:creationId xmlns:a16="http://schemas.microsoft.com/office/drawing/2014/main" id="{CC939F68-2980-ABA7-390C-1F1145B3F539}"/>
+              </a:ext>
+            </a:extLst>
+          </p:cNvPr>
+          <p:cNvSpPr txBox="1"/>
+          <p:nvPr/>
+        </p:nvSpPr>
+        <p:spPr>
+          <a:xfrm>
+            <a:off x="5985124" y="7619378"/>
+            <a:ext cx="1787276" cy="1015663"/>
+          </a:xfrm>
+          <a:prstGeom prst="rect">
+            <a:avLst/>
+          </a:prstGeom>
+          <a:noFill/>
+        </p:spPr>
+        <p:txBody>
+          <a:bodyPr wrap="square">
+            <a:spAutoFit/>
+          </a:bodyPr>
+          <a:lstStyle/>
+          <a:p>
+            <a:r>
+              <a:rPr lang="es-ES" sz="1200" dirty="0"/>
+              <a:t>La distancia y la duración del viaje son las variables más correlacionadas con la tarifa.</a:t>
+            </a:r>
+            <a:endParaRPr lang="es-ES" sz="1200" dirty="0">
+              <a:latin typeface="Segoe UI" panose="020B0502040204020203" pitchFamily="34" charset="0"/>
+              <a:cs typeface="Segoe UI" panose="020B0502040204020203" pitchFamily="34" charset="0"/>
+            </a:endParaRPr>
+          </a:p>
+        </p:txBody>
+      </p:sp>
+      <p:sp>
+        <p:nvSpPr>
+          <p:cNvPr id="18" name="CuadroTexto 17">
+            <a:extLst>
+              <a:ext uri="{FF2B5EF4-FFF2-40B4-BE49-F238E27FC236}">
+                <a16:creationId xmlns:a16="http://schemas.microsoft.com/office/drawing/2014/main" id="{D7C6075A-A172-F69F-7013-E5769EA2CC7D}"/>
+              </a:ext>
+            </a:extLst>
+          </p:cNvPr>
+          <p:cNvSpPr txBox="1"/>
+          <p:nvPr/>
+        </p:nvSpPr>
+        <p:spPr>
+          <a:xfrm>
+            <a:off x="0" y="9716361"/>
+            <a:ext cx="7902053" cy="276999"/>
+          </a:xfrm>
+          <a:prstGeom prst="rect">
+            <a:avLst/>
+          </a:prstGeom>
+          <a:noFill/>
+        </p:spPr>
+        <p:txBody>
+          <a:bodyPr wrap="square">
+            <a:spAutoFit/>
+          </a:bodyPr>
+          <a:lstStyle/>
+          <a:p>
+            <a:r>
+              <a:rPr lang="es-ES" sz="1200" dirty="0"/>
+              <a:t>Los residuos se distribuyen de forma simétrica alrededor de 0, indicando ausencia de sesgo sistemático.</a:t>
+            </a:r>
+            <a:endParaRPr lang="es-ES" sz="1200" dirty="0">
+              <a:latin typeface="Segoe UI" panose="020B0502040204020203" pitchFamily="34" charset="0"/>
+              <a:cs typeface="Segoe UI" panose="020B0502040204020203" pitchFamily="34" charset="0"/>
+            </a:endParaRPr>
+          </a:p>
+        </p:txBody>
+      </p:sp>
+    </p:spTree>
+    <p:extLst>
+      <p:ext uri="{BB962C8B-B14F-4D97-AF65-F5344CB8AC3E}">
+        <p14:creationId xmlns:p14="http://schemas.microsoft.com/office/powerpoint/2010/main" val="822654762"/>
+      </p:ext>
+    </p:extLst>
+  </p:cSld>
+  <p:clrMapOvr>
+    <a:masterClrMapping/>
+  </p:clrMapOvr>
+</p:sld>
+</file>
+
+<file path=ppt/slides/slide7.xml><?xml version="1.0" encoding="utf-8"?>
+<p:sld xmlns:a="http://schemas.openxmlformats.org/drawingml/2006/main" xmlns:r="http://schemas.openxmlformats.org/officeDocument/2006/relationships" xmlns:p="http://schemas.openxmlformats.org/presentationml/2006/main">
+  <p:cSld>
+    <p:spTree>
+      <p:nvGrpSpPr>
         <p:cNvPr id="1" name="Shape 450"/>
         <p:cNvGrpSpPr/>
         <p:nvPr/>
@@ -11903,7 +12890,7 @@
 </p:sld>
 </file>
 
-<file path=ppt/slides/slide7.xml><?xml version="1.0" encoding="utf-8"?>
+<file path=ppt/slides/slide8.xml><?xml version="1.0" encoding="utf-8"?>
 <p:sld xmlns:a="http://schemas.openxmlformats.org/drawingml/2006/main" xmlns:r="http://schemas.openxmlformats.org/officeDocument/2006/relationships" xmlns:p="http://schemas.openxmlformats.org/presentationml/2006/main">
   <p:cSld>
     <p:spTree>
@@ -12715,7 +13702,7 @@
 </p:sld>
 </file>
 
-<file path=ppt/slides/slide8.xml><?xml version="1.0" encoding="utf-8"?>
+<file path=ppt/slides/slide9.xml><?xml version="1.0" encoding="utf-8"?>
 <p:sld xmlns:a="http://schemas.openxmlformats.org/drawingml/2006/main" xmlns:r="http://schemas.openxmlformats.org/officeDocument/2006/relationships" xmlns:p="http://schemas.openxmlformats.org/presentationml/2006/main">
   <p:cSld>
     <p:spTree>
